--- a/ziliao/lecoo用户中心-开发方案与实施路线图-V1.0.pptx
+++ b/ziliao/lecoo用户中心-开发方案与实施路线图-V1.0.pptx
@@ -3594,7 +3594,7 @@
                 </a:solidFill>
                 <a:latin typeface="PingFang SC"/>
               </a:rPr>
-              <a:t>解决方案：分层匹配、置信度分流、全量留痕</a:t>
+              <a:t>核心难点与方案｜账号匹配策略</a:t>
             </a:r>
           </a:p>
         </p:txBody>
@@ -5638,7 +5638,7 @@
                 </a:solidFill>
                 <a:latin typeface="PingFang SC"/>
               </a:rPr>
-              <a:t>难点二：账号开通与关闭无法完全线上化</a:t>
+              <a:t>核心难点与方案｜线上线下闭环</a:t>
             </a:r>
           </a:p>
         </p:txBody>
@@ -7113,7 +7113,7 @@
                 </a:solidFill>
                 <a:latin typeface="PingFang SC"/>
               </a:rPr>
-              <a:t>权限治理：普通权限看全貌，成本权限看责任</a:t>
+              <a:t>核心难点与方案｜成本权限治理</a:t>
             </a:r>
           </a:p>
         </p:txBody>
@@ -7938,7 +7938,7 @@
                 </a:solidFill>
                 <a:latin typeface="PingFang SC"/>
               </a:rPr>
-              <a:t>难点三：个人数据、待办和责任必须在系统内流转</a:t>
+              <a:t>核心难点与方案｜个人数据与待办流转</a:t>
             </a:r>
           </a:p>
         </p:txBody>
@@ -9261,7 +9261,7 @@
                 </a:solidFill>
                 <a:latin typeface="PingFang SC"/>
               </a:rPr>
-              <a:t>负责人 / 部门上级：团队账号管理</a:t>
+              <a:t>核心难点与方案｜团队账号管理</a:t>
             </a:r>
           </a:p>
         </p:txBody>
@@ -10937,7 +10937,7 @@
                 </a:solidFill>
                 <a:latin typeface="PingFang SC"/>
               </a:rPr>
-              <a:t>季度审计闭环：从 Excel 比对升级为可持续任务</a:t>
+              <a:t>核心难点与方案｜季度审计闭环</a:t>
             </a:r>
           </a:p>
         </p:txBody>
@@ -12461,7 +12461,7 @@
                 </a:solidFill>
                 <a:latin typeface="PingFang SC"/>
               </a:rPr>
-              <a:t>季度账号与敏感权限核查全流程</a:t>
+              <a:t>核心难点与方案｜季度核查流程</a:t>
             </a:r>
           </a:p>
         </p:txBody>
@@ -14731,7 +14731,7 @@
                 </a:solidFill>
                 <a:latin typeface="PingFang SC"/>
               </a:rPr>
-              <a:t>技术架构：认证、治理、连接器三层解耦</a:t>
+              <a:t>技术实现与一期计划｜技术架构</a:t>
             </a:r>
           </a:p>
         </p:txBody>
@@ -16193,7 +16193,7 @@
                 </a:solidFill>
                 <a:latin typeface="PingFang SC"/>
               </a:rPr>
-              <a:t>核心数据模型：把“人、账号、权限、责任、证据”连起来</a:t>
+              <a:t>技术实现与一期计划｜核心数据模型</a:t>
             </a:r>
           </a:p>
         </p:txBody>
@@ -17487,7 +17487,7 @@
                 </a:solidFill>
                 <a:latin typeface="PingFang SC"/>
               </a:rPr>
-              <a:t>一期范围：先打通“导入—关联—复核—汇报”最小闭环</a:t>
+              <a:t>技术实现与一期计划｜一期建设范围</a:t>
             </a:r>
           </a:p>
         </p:txBody>
@@ -19556,7 +19556,7 @@
                 </a:solidFill>
                 <a:latin typeface="PingFang SC"/>
               </a:rPr>
-              <a:t>实施路线图：建议 16 周完成一期试点</a:t>
+              <a:t>技术实现与一期计划｜实施路线图</a:t>
             </a:r>
           </a:p>
         </p:txBody>
@@ -20974,7 +20974,7 @@
                 </a:solidFill>
                 <a:latin typeface="PingFang SC"/>
               </a:rPr>
-              <a:t>主要风险与评审决策</a:t>
+              <a:t>当前问题与待确认｜风险及评审决策</a:t>
             </a:r>
           </a:p>
         </p:txBody>
@@ -22231,7 +22231,7 @@
                 </a:solidFill>
                 <a:latin typeface="PingFang SC"/>
               </a:rPr>
-              <a:t>执行摘要：从“统一登录”升级为“身份治理平台”</a:t>
+              <a:t>建设需求与现状｜执行摘要</a:t>
             </a:r>
           </a:p>
         </p:txBody>
@@ -23136,7 +23136,7 @@
                 </a:solidFill>
                 <a:latin typeface="PingFang SC"/>
               </a:rPr>
-              <a:t>现状证据：问题不是缺少清单，而是缺少统一治理链路</a:t>
+              <a:t>建设需求与现状｜现状问题</a:t>
             </a:r>
           </a:p>
         </p:txBody>
@@ -24365,7 +24365,7 @@
                 </a:solidFill>
                 <a:latin typeface="PingFang SC"/>
               </a:rPr>
-              <a:t>系统定位与边界</a:t>
+              <a:t>建设需求与现状｜系统定位与边界</a:t>
             </a:r>
           </a:p>
         </p:txBody>
@@ -25039,7 +25039,7 @@
                 </a:solidFill>
                 <a:latin typeface="PingFang SC"/>
               </a:rPr>
-              <a:t>功能全景：两大模块、六条能力主线</a:t>
+              <a:t>实现目标与功能｜功能全景</a:t>
             </a:r>
           </a:p>
         </p:txBody>
@@ -26681,7 +26681,7 @@
                 </a:solidFill>
                 <a:latin typeface="PingFang SC"/>
               </a:rPr>
-              <a:t>登录方案：按风险分级，而不是把所有因子堆在一起</a:t>
+              <a:t>实现目标与功能｜登录安全</a:t>
             </a:r>
           </a:p>
         </p:txBody>
@@ -27813,7 +27813,7 @@
                 </a:solidFill>
                 <a:latin typeface="PingFang SC"/>
               </a:rPr>
-              <a:t>子系统接入：标准协议 + 准入策略 + 独立会话</a:t>
+              <a:t>实现目标与功能｜子系统接入</a:t>
             </a:r>
           </a:p>
         </p:txBody>
@@ -29104,7 +29104,7 @@
                 </a:solidFill>
                 <a:latin typeface="PingFang SC"/>
               </a:rPr>
-              <a:t>难点一：多系统账号如何统一到“一个人”</a:t>
+              <a:t>核心难点与方案｜多系统账号统一</a:t>
             </a:r>
           </a:p>
         </p:txBody>
